--- a/互动游戏课件/02-W10-互动游戏.pptx
+++ b/互动游戏课件/02-W10-互动游戏.pptx
@@ -12,6 +12,7 @@
     <p:sldId id="260" r:id="rId11"/>
     <p:sldId id="261" r:id="rId12"/>
     <p:sldId id="262" r:id="rId13"/>
+    <p:sldId id="263" r:id="rId14"/>
   </p:sldIdLst>
   <p:sldSz cx="12191695" cy="6858000" type="screen4x3"/>
   <p:notesSz cx="6858000" cy="9144000"/>
@@ -5212,6 +5213,124 @@
                 <a:latin typeface="微软雅黑"/>
               </a:rPr>
               <a:t>重庆两江智造集团 · 02-程序设计基础 · W10</a:t>
+            </a:r>
+          </a:p>
+        </p:txBody>
+      </p:sp>
+    </p:spTree>
+  </p:cSld>
+  <p:clrMapOvr>
+    <a:masterClrMapping/>
+  </p:clrMapOvr>
+</p:sld>
+</file>
+
+<file path=ppt/slides/slide8.xml><?xml version="1.0" encoding="utf-8"?>
+<p:sld xmlns:a="http://schemas.openxmlformats.org/drawingml/2006/main" xmlns:p="http://schemas.openxmlformats.org/presentationml/2006/main" xmlns:r="http://schemas.openxmlformats.org/officeDocument/2006/relationships">
+  <p:cSld>
+    <p:spTree>
+      <p:nvGrpSpPr>
+        <p:cNvPr id="1" name=""/>
+        <p:cNvGrpSpPr/>
+        <p:nvPr/>
+      </p:nvGrpSpPr>
+      <p:grpSpPr/>
+      <p:sp>
+        <p:nvSpPr>
+          <p:cNvPr id="2" name="TextBox 1"/>
+          <p:cNvSpPr txBox="1"/>
+          <p:nvPr/>
+        </p:nvSpPr>
+        <p:spPr>
+          <a:xfrm>
+            <a:off x="432000" y="432000"/>
+            <a:ext cx="8100000" cy="5760000"/>
+          </a:xfrm>
+          <a:prstGeom prst="rect">
+            <a:avLst/>
+          </a:prstGeom>
+          <a:noFill/>
+        </p:spPr>
+        <p:txBody>
+          <a:bodyPr wrap="square">
+            <a:spAutoFit/>
+          </a:bodyPr>
+          <a:lstStyle/>
+          <a:p>
+            <a:pPr>
+              <a:spcAft>
+                <a:spcPts val="800"/>
+              </a:spcAft>
+            </a:pPr>
+            <a:r>
+              <a:rPr sz="2000" b="1"/>
+              <a:t>安全与合规警示（操作前必读）</a:t>
+            </a:r>
+          </a:p>
+          <a:p>
+            <a:pPr>
+              <a:spcAft>
+                <a:spcPts val="800"/>
+              </a:spcAft>
+            </a:pPr>
+            <a:r>
+              <a:rPr sz="1400" b="0"/>
+              <a:t>1. 上机前确认本工位电源开关与急停位置，确认设备处于安全状态。</a:t>
+            </a:r>
+          </a:p>
+          <a:p>
+            <a:pPr>
+              <a:spcAft>
+                <a:spcPts val="800"/>
+              </a:spcAft>
+            </a:pPr>
+            <a:r>
+              <a:rPr sz="1400" b="0"/>
+              <a:t>2. 涉及接线的操作一律先断电、后验电、再作业，禁止带电插拔。</a:t>
+            </a:r>
+          </a:p>
+          <a:p>
+            <a:pPr>
+              <a:spcAft>
+                <a:spcPts val="800"/>
+              </a:spcAft>
+            </a:pPr>
+            <a:r>
+              <a:rPr sz="1400" b="0"/>
+              <a:t>3. 身体任何部位不进入设备运动/散热区域，长发束起，不佩戴悬垂饰物。</a:t>
+            </a:r>
+          </a:p>
+          <a:p>
+            <a:pPr>
+              <a:spcAft>
+                <a:spcPts val="800"/>
+              </a:spcAft>
+            </a:pPr>
+            <a:r>
+              <a:rPr sz="1400" b="0"/>
+              <a:t>4. 调试程序前先静态检查、再低速小样本试运行，确认无异常后放大规模。</a:t>
+            </a:r>
+          </a:p>
+          <a:p>
+            <a:pPr>
+              <a:spcAft>
+                <a:spcPts val="800"/>
+              </a:spcAft>
+            </a:pPr>
+            <a:r>
+              <a:rPr sz="1400" b="0"/>
+              <a:t>5. 任何不确定或异常情况，立即停止操作并报告指导教师，不擅自处置。</a:t>
+            </a:r>
+          </a:p>
+          <a:p>
+            <a:pPr>
+              <a:spcAft>
+                <a:spcPts val="800"/>
+              </a:spcAft>
+            </a:pPr>
+            <a:r>
+              <a:rPr sz="1400" b="0"/>
+              <a:t>以上任一条违反，本次任务按课程标准「安全规范一票否决」条款记 0 分并中止实训。</a:t>
             </a:r>
           </a:p>
         </p:txBody>
